--- a/Slides.pptx
+++ b/Slides.pptx
@@ -132,6 +132,11 @@
       </a:defRPr>
     </a:lvl9pPr>
   </p:defaultTextStyle>
+  <p:extLst>
+    <p:ext uri="{EFAFB233-063F-42B5-8137-9DF3F51BA10A}">
+      <p15:sldGuideLst xmlns:p15="http://schemas.microsoft.com/office/powerpoint/2012/main"/>
+    </p:ext>
+  </p:extLst>
 </p:presentation>
 </file>
 
@@ -20487,8 +20492,8 @@
           </a:p>
         </p:txBody>
       </p:sp>
-      <mc:AlternateContent xmlns:mc="http://schemas.openxmlformats.org/markup-compatibility/2006">
-        <mc:Choice xmlns:a14="http://schemas.microsoft.com/office/drawing/2010/main" Requires="a14">
+      <mc:AlternateContent xmlns:mc="http://schemas.openxmlformats.org/markup-compatibility/2006" xmlns:a14="http://schemas.microsoft.com/office/drawing/2010/main">
+        <mc:Choice Requires="a14">
           <p:sp>
             <p:nvSpPr>
               <p:cNvPr id="2" name="TextBox 1">
@@ -20517,6 +20522,7 @@
               </a:bodyPr>
               <a:lstStyle/>
               <a:p>
+                <a:pPr/>
                 <a14:m>
                   <m:oMathPara xmlns:m="http://schemas.openxmlformats.org/officeDocument/2006/math">
                     <m:oMathParaPr>
@@ -20729,7 +20735,7 @@
             </p:txBody>
           </p:sp>
         </mc:Choice>
-        <mc:Fallback>
+        <mc:Fallback xmlns="">
           <p:sp>
             <p:nvSpPr>
               <p:cNvPr id="2" name="TextBox 1">
@@ -25503,7 +25509,7 @@
           <a:p>
             <a:r>
               <a:rPr lang="en-US" dirty="0"/>
-              <a:t>After 6 rounds of 2 epochs, we can get reasonable accuracy of XX% and YY% via federated learning</a:t>
+              <a:t>After 6 rounds of 2 epochs, we can get accuracy of 72% (BP) and 54% (FF) via federated learning. </a:t>
             </a:r>
           </a:p>
           <a:p>
@@ -25545,16 +25551,24 @@
             <p:ph type="title"/>
           </p:nvPr>
         </p:nvSpPr>
-        <p:spPr/>
+        <p:spPr>
+          <a:xfrm>
+            <a:off x="391680" y="291888"/>
+            <a:ext cx="11265120" cy="540216"/>
+          </a:xfrm>
+        </p:spPr>
         <p:txBody>
           <a:bodyPr/>
           <a:lstStyle/>
           <a:p>
+            <a:pPr marL="0" indent="0">
+              <a:buNone/>
+            </a:pPr>
             <a:r>
-              <a:rPr lang="en-US" dirty="0"/>
+              <a:rPr lang="en-US" sz="4000" dirty="0"/>
               <a:t>Conclusion</a:t>
             </a:r>
-            <a:endParaRPr lang="en-SE" dirty="0"/>
+            <a:endParaRPr lang="en-SE" sz="4000" dirty="0"/>
           </a:p>
         </p:txBody>
       </p:sp>

--- a/Slides.pptx
+++ b/Slides.pptx
@@ -21057,7 +21057,7 @@
           <p:nvPr>
             <p:extLst>
               <p:ext uri="{D42A27DB-BD31-4B8C-83A1-F6EECF244321}">
-                <p14:modId xmlns:p14="http://schemas.microsoft.com/office/powerpoint/2010/main" val="2670813078"/>
+                <p14:modId xmlns:p14="http://schemas.microsoft.com/office/powerpoint/2010/main" val="3117306702"/>
               </p:ext>
             </p:extLst>
           </p:nvPr>
@@ -22090,7 +22090,7 @@
                           <a:latin typeface="Arial"/>
                           <a:ea typeface="Arial"/>
                         </a:rPr>
-                        <a:t>1000 </a:t>
+                        <a:t>500 </a:t>
                       </a:r>
                       <a:endParaRPr lang="en-US" sz="2400" b="0" u="none" strike="noStrike" dirty="0">
                         <a:solidFill>
@@ -22147,7 +22147,7 @@
                           <a:latin typeface="Arial"/>
                           <a:ea typeface="Arial"/>
                         </a:rPr>
-                        <a:t>400 </a:t>
+                        <a:t>200 </a:t>
                       </a:r>
                       <a:endParaRPr lang="en-US" sz="2400" b="0" u="none" strike="noStrike" dirty="0">
                         <a:solidFill>
@@ -22204,7 +22204,7 @@
                           <a:latin typeface="Arial"/>
                           <a:ea typeface="Arial"/>
                         </a:rPr>
-                        <a:t>200</a:t>
+                        <a:t>100</a:t>
                       </a:r>
                       <a:r>
                         <a:rPr lang="en" sz="2400" b="0" u="none" strike="noStrike" dirty="0">
